--- a/dist/초4/사회·역사/경제와참여/초4_사회·역사_경제와참여_01_필요와선택.pptx
+++ b/dist/초4/사회·역사/경제와참여/초4_사회·역사_경제와참여_01_필요와선택.pptx
@@ -121,13 +121,13 @@
   <p:extLst>
     <p:ext uri="{521415D9-36F7-43E2-AB2F-B90AF26B5E84}">
       <p14:sectionLst xmlns:p14="http://schemas.microsoft.com/office/powerpoint/2010/main">
-        <p14:section name="도입" id="{8bd2f659-df7e-2e3e-3c54-796f1fb80ed4}">
+        <p14:section name="도입" id="{fdf18e17-a786-3e16-45bf-807f13fc0887}">
           <p14:sldIdLst>
             <p14:sldId id="256"/>
             <p14:sldId id="257"/>
           </p14:sldIdLst>
         </p14:section>
-        <p14:section name="개념" id="{a2414ed3-58e3-3e80-26f1-8bbf41c277c4}">
+        <p14:section name="개념" id="{0f7931aa-ac24-d375-1683-bfcc45af9922}">
           <p14:sldIdLst>
             <p14:sldId id="258"/>
             <p14:sldId id="259"/>
@@ -135,7 +135,7 @@
             <p14:sldId id="263"/>
           </p14:sldIdLst>
         </p14:section>
-        <p14:section name="연습" id="{bf3a5992-e7d7-954d-61bd-703218003efc}">
+        <p14:section name="연습" id="{f797c3d9-58f9-26fb-9bf1-b8f049c725ee}">
           <p14:sldIdLst>
             <p14:sldId id="260"/>
             <p14:sldId id="261"/>
@@ -143,25 +143,25 @@
             <p14:sldId id="265"/>
           </p14:sldIdLst>
         </p14:section>
-        <p14:section name="개념" id="{e456ae7a-59d2-34d8-e75c-02d5502948bf}">
+        <p14:section name="개념" id="{1c30049a-94db-0efe-c6db-e7d61209c1fc}">
           <p14:sldIdLst/>
         </p14:section>
-        <p14:section name="연습" id="{3e7764de-f3c5-d911-13f3-13e0dac9743f}">
+        <p14:section name="연습" id="{6a9d631a-8c71-4b54-af2b-46dafbe6281b}">
           <p14:sldIdLst/>
         </p14:section>
-        <p14:section name="확인" id="{57172e0f-8f14-b1c7-d9ec-f18340d9c01d}">
+        <p14:section name="확인" id="{cf34c14c-4f4c-c187-f479-1121ddabb59d}">
           <p14:sldIdLst>
             <p14:sldId id="266"/>
             <p14:sldId id="267"/>
             <p14:sldId id="268"/>
           </p14:sldIdLst>
         </p14:section>
-        <p14:section name="정리" id="{0cacf9c9-0b71-26fc-d316-4df4071dadc4}">
+        <p14:section name="정리" id="{7e8b80b1-2255-bf17-9033-040f7d7aada1}">
           <p14:sldIdLst>
             <p14:sldId id="269"/>
           </p14:sldIdLst>
         </p14:section>
-        <p14:section name="보충" id="{4dcee558-edd0-a2a8-2eb7-d9ced3f525c9}">
+        <p14:section name="보충" id="{40254fd7-2267-8803-ab97-94badef9e023}">
           <p14:sldIdLst>
             <p14:sldId id="270"/>
           </p14:sldIdLst>
@@ -8013,7 +8013,27 @@
                 <a:ea typeface="맑은 고딕" pitchFamily="34" charset="-122"/>
                 <a:cs typeface="맑은 고딕" pitchFamily="34" charset="-120"/>
               </a:rPr>
-              <a:t>모두 가질 수 없으니 무엇을 할지 골라야 해요. 이것이 선택이에요.</a:t>
+              <a:t>모두 가질 수 없으니 무엇을 할지 골라야 해요.</a:t>
+            </a:r>
+            <a:endParaRPr lang="ko-KR" sz="3000" dirty="0"/>
+          </a:p>
+          <a:p>
+            <a:pPr eaLnBrk="0" indent="0" marL="0">
+              <a:spcAft>
+                <a:spcPts val="600"/>
+              </a:spcAft>
+              <a:buNone/>
+            </a:pPr>
+            <a:r>
+              <a:rPr lang="ko-KR" altLang="en-US" sz="3000" dirty="0">
+                <a:solidFill>
+                  <a:srgbClr val="1F2937"/>
+                </a:solidFill>
+                <a:latin typeface="맑은 고딕" pitchFamily="34" charset="0"/>
+                <a:ea typeface="맑은 고딕" pitchFamily="34" charset="-122"/>
+                <a:cs typeface="맑은 고딕" pitchFamily="34" charset="-120"/>
+              </a:rPr>
+              <a:t>이것을 선택이라고 해요.</a:t>
             </a:r>
             <a:endParaRPr lang="ko-KR" sz="3000" dirty="0"/>
           </a:p>
@@ -8340,7 +8360,7 @@
                 <a:ea typeface="맑은 고딕" pitchFamily="34" charset="-122"/>
                 <a:cs typeface="맑은 고딕" pitchFamily="34" charset="-120"/>
               </a:rPr>
-              <a:t>형제가 모두 먹고 싶어요.</a:t>
+              <a:t>형제가 다 원해요.</a:t>
             </a:r>
             <a:endParaRPr lang="ko-KR" sz="3000" dirty="0"/>
           </a:p>
@@ -8934,7 +8954,27 @@
                 <a:ea typeface="맑은 고딕" pitchFamily="34" charset="-122"/>
                 <a:cs typeface="맑은 고딕" pitchFamily="34" charset="-120"/>
               </a:rPr>
-              <a:t>우리 집에는 우산이 2개 있어요. 가족 네 명이 모두 밖에 나가야 해요.</a:t>
+              <a:t>우리 집에는 우산이 2개 있어요.</a:t>
+            </a:r>
+            <a:endParaRPr lang="ko-KR" sz="3000" dirty="0"/>
+          </a:p>
+          <a:p>
+            <a:pPr eaLnBrk="0" indent="0" marL="0">
+              <a:spcAft>
+                <a:spcPts val="600"/>
+              </a:spcAft>
+              <a:buNone/>
+            </a:pPr>
+            <a:r>
+              <a:rPr lang="ko-KR" altLang="en-US" sz="3000" dirty="0">
+                <a:solidFill>
+                  <a:srgbClr val="1F2937"/>
+                </a:solidFill>
+                <a:latin typeface="맑은 고딕" pitchFamily="34" charset="0"/>
+                <a:ea typeface="맑은 고딕" pitchFamily="34" charset="-122"/>
+                <a:cs typeface="맑은 고딕" pitchFamily="34" charset="-120"/>
+              </a:rPr>
+              <a:t>가족 네 명이 모두 밖에 나가야 해요.</a:t>
             </a:r>
             <a:endParaRPr lang="ko-KR" sz="3000" dirty="0"/>
           </a:p>
@@ -10004,7 +10044,27 @@
                 <a:ea typeface="맑은 고딕" pitchFamily="34" charset="-122"/>
                 <a:cs typeface="맑은 고딕" pitchFamily="34" charset="-120"/>
               </a:rPr>
-              <a:t>색연필 세트와 공책을 사면 5,000원. 스티커와 과자는 이번에 포기해요.</a:t>
+              <a:t>색연필 세트와 공책을 사면 5,000원.</a:t>
+            </a:r>
+            <a:endParaRPr lang="ko-KR" sz="3000" dirty="0"/>
+          </a:p>
+          <a:p>
+            <a:pPr eaLnBrk="0" indent="0" marL="0">
+              <a:spcAft>
+                <a:spcPts val="600"/>
+              </a:spcAft>
+              <a:buNone/>
+            </a:pPr>
+            <a:r>
+              <a:rPr lang="ko-KR" altLang="en-US" sz="3000" dirty="0">
+                <a:solidFill>
+                  <a:srgbClr val="1F2937"/>
+                </a:solidFill>
+                <a:latin typeface="맑은 고딕" pitchFamily="34" charset="0"/>
+                <a:ea typeface="맑은 고딕" pitchFamily="34" charset="-122"/>
+                <a:cs typeface="맑은 고딕" pitchFamily="34" charset="-120"/>
+              </a:rPr>
+              <a:t>스티커와 과자는 이번에 포기해요.</a:t>
             </a:r>
             <a:endParaRPr lang="ko-KR" sz="3000" dirty="0"/>
           </a:p>

--- a/dist/초4/사회·역사/경제와참여/초4_사회·역사_경제와참여_01_필요와선택.pptx
+++ b/dist/초4/사회·역사/경제와참여/초4_사회·역사_경제와참여_01_필요와선택.pptx
@@ -121,13 +121,13 @@
   <p:extLst>
     <p:ext uri="{521415D9-36F7-43E2-AB2F-B90AF26B5E84}">
       <p14:sectionLst xmlns:p14="http://schemas.microsoft.com/office/powerpoint/2010/main">
-        <p14:section name="도입" id="{fdf18e17-a786-3e16-45bf-807f13fc0887}">
+        <p14:section name="도입" id="{94717795-f97c-32ee-2283-22d0e0beaa21}">
           <p14:sldIdLst>
             <p14:sldId id="256"/>
             <p14:sldId id="257"/>
           </p14:sldIdLst>
         </p14:section>
-        <p14:section name="개념" id="{0f7931aa-ac24-d375-1683-bfcc45af9922}">
+        <p14:section name="개념" id="{be4790f8-ec2d-049e-9c07-44be95a534d9}">
           <p14:sldIdLst>
             <p14:sldId id="258"/>
             <p14:sldId id="259"/>
@@ -135,7 +135,7 @@
             <p14:sldId id="263"/>
           </p14:sldIdLst>
         </p14:section>
-        <p14:section name="연습" id="{f797c3d9-58f9-26fb-9bf1-b8f049c725ee}">
+        <p14:section name="연습" id="{f6c33b7c-a54b-faef-5121-6e44d1834fe3}">
           <p14:sldIdLst>
             <p14:sldId id="260"/>
             <p14:sldId id="261"/>
@@ -143,25 +143,25 @@
             <p14:sldId id="265"/>
           </p14:sldIdLst>
         </p14:section>
-        <p14:section name="개념" id="{1c30049a-94db-0efe-c6db-e7d61209c1fc}">
+        <p14:section name="개념" id="{85e19406-7160-355b-2ecd-515708586fdd}">
           <p14:sldIdLst/>
         </p14:section>
-        <p14:section name="연습" id="{6a9d631a-8c71-4b54-af2b-46dafbe6281b}">
+        <p14:section name="연습" id="{80898bf6-4407-dc7d-59aa-7a175a4434c3}">
           <p14:sldIdLst/>
         </p14:section>
-        <p14:section name="확인" id="{cf34c14c-4f4c-c187-f479-1121ddabb59d}">
+        <p14:section name="확인" id="{79109007-f2b1-32c1-3679-d4a6e30c571a}">
           <p14:sldIdLst>
             <p14:sldId id="266"/>
             <p14:sldId id="267"/>
             <p14:sldId id="268"/>
           </p14:sldIdLst>
         </p14:section>
-        <p14:section name="정리" id="{7e8b80b1-2255-bf17-9033-040f7d7aada1}">
+        <p14:section name="정리" id="{04d007cf-fdaf-cc6e-df2a-08b66e4b6fc7}">
           <p14:sldIdLst>
             <p14:sldId id="269"/>
           </p14:sldIdLst>
         </p14:section>
-        <p14:section name="보충" id="{40254fd7-2267-8803-ab97-94badef9e023}">
+        <p14:section name="보충" id="{e1ae70e4-28f2-5d6f-e9f6-5a37b205834b}">
           <p14:sldIdLst>
             <p14:sldId id="270"/>
           </p14:sldIdLst>
@@ -3437,7 +3437,7 @@
                 <a:ea typeface="맑은 고딕" pitchFamily="34" charset="-122"/>
                 <a:cs typeface="맑은 고딕" pitchFamily="34" charset="-120"/>
               </a:rPr>
-              <a:t>☐ 부족했던 것(돈·시간·물건)</a:t>
+              <a:t>☐ 부족했던 것</a:t>
             </a:r>
             <a:endParaRPr lang="ko-KR" sz="3000" dirty="0"/>
           </a:p>
@@ -6180,11 +6180,11 @@
         <p:spPr>
           <a:xfrm>
             <a:off x="548640" y="1325880"/>
-            <a:ext cx="11091672" cy="1723644"/>
+            <a:ext cx="11091672" cy="1258824"/>
           </a:xfrm>
           <a:prstGeom prst="roundRect">
             <a:avLst>
-              <a:gd name="adj" fmla="val 6366"/>
+              <a:gd name="adj" fmla="val 8717"/>
             </a:avLst>
           </a:prstGeom>
           <a:solidFill>
@@ -6207,7 +6207,7 @@
         <p:spPr>
           <a:xfrm>
             <a:off x="822960" y="1463040"/>
-            <a:ext cx="10543032" cy="1449324"/>
+            <a:ext cx="10543032" cy="984504"/>
           </a:xfrm>
           <a:prstGeom prst="rect">
             <a:avLst/>
@@ -6234,7 +6234,7 @@
                 <a:ea typeface="맑은 고딕" pitchFamily="34" charset="-122"/>
                 <a:cs typeface="맑은 고딕" pitchFamily="34" charset="-120"/>
               </a:rPr>
-              <a:t>원하는 것에 비해 돈·시간·물건이 부족해서(희소성) 우리는 골라야 해요.</a:t>
+              <a:t>돈·시간·물건이 부족해서(희소성) 우리는 골라야 해요.</a:t>
             </a:r>
             <a:endParaRPr lang="ko-KR" sz="3000" dirty="0"/>
           </a:p>
@@ -6268,7 +6268,7 @@
         </p:nvSpPr>
         <p:spPr>
           <a:xfrm>
-            <a:off x="548640" y="3278124"/>
+            <a:off x="548640" y="2813304"/>
             <a:ext cx="5431536" cy="594360"/>
           </a:xfrm>
           <a:prstGeom prst="roundRect">
@@ -6315,7 +6315,7 @@
         </p:nvSpPr>
         <p:spPr>
           <a:xfrm>
-            <a:off x="6208776" y="3278124"/>
+            <a:off x="6208776" y="2813304"/>
             <a:ext cx="5431536" cy="594360"/>
           </a:xfrm>
           <a:prstGeom prst="roundRect">
@@ -6362,7 +6362,7 @@
         </p:nvSpPr>
         <p:spPr>
           <a:xfrm>
-            <a:off x="548640" y="4101084"/>
+            <a:off x="548640" y="3636264"/>
             <a:ext cx="11091672" cy="457200"/>
           </a:xfrm>
           <a:prstGeom prst="rect">
@@ -6401,8 +6401,8 @@
         </p:nvSpPr>
         <p:spPr>
           <a:xfrm>
-            <a:off x="548640" y="4604004"/>
-            <a:ext cx="3544824" cy="973836"/>
+            <a:off x="548640" y="4139184"/>
+            <a:ext cx="3544824" cy="1438656"/>
           </a:xfrm>
           <a:prstGeom prst="rect">
             <a:avLst/>
@@ -6440,8 +6440,8 @@
         </p:nvSpPr>
         <p:spPr>
           <a:xfrm>
-            <a:off x="4322064" y="4604004"/>
-            <a:ext cx="3544824" cy="973836"/>
+            <a:off x="4322064" y="4139184"/>
+            <a:ext cx="3544824" cy="1438656"/>
           </a:xfrm>
           <a:prstGeom prst="rect">
             <a:avLst/>
@@ -6496,8 +6496,8 @@
         </p:nvSpPr>
         <p:spPr>
           <a:xfrm>
-            <a:off x="8095488" y="4604004"/>
-            <a:ext cx="3544824" cy="973836"/>
+            <a:off x="8095488" y="4139184"/>
+            <a:ext cx="3544824" cy="1438656"/>
           </a:xfrm>
           <a:prstGeom prst="rect">
             <a:avLst/>

--- a/dist/초4/사회·역사/경제와참여/초4_사회·역사_경제와참여_01_필요와선택.pptx
+++ b/dist/초4/사회·역사/경제와참여/초4_사회·역사_경제와참여_01_필요와선택.pptx
@@ -121,13 +121,13 @@
   <p:extLst>
     <p:ext uri="{521415D9-36F7-43E2-AB2F-B90AF26B5E84}">
       <p14:sectionLst xmlns:p14="http://schemas.microsoft.com/office/powerpoint/2010/main">
-        <p14:section name="도입" id="{94717795-f97c-32ee-2283-22d0e0beaa21}">
+        <p14:section name="도입" id="{06cb1ecb-17ef-8562-26b3-a543ca071d74}">
           <p14:sldIdLst>
             <p14:sldId id="256"/>
             <p14:sldId id="257"/>
           </p14:sldIdLst>
         </p14:section>
-        <p14:section name="개념" id="{be4790f8-ec2d-049e-9c07-44be95a534d9}">
+        <p14:section name="개념" id="{491d9acf-a144-1c40-d63d-409836c3c537}">
           <p14:sldIdLst>
             <p14:sldId id="258"/>
             <p14:sldId id="259"/>
@@ -135,7 +135,7 @@
             <p14:sldId id="263"/>
           </p14:sldIdLst>
         </p14:section>
-        <p14:section name="연습" id="{f6c33b7c-a54b-faef-5121-6e44d1834fe3}">
+        <p14:section name="연습" id="{b4f2c279-d24d-66a3-54dc-f7626d2fa5c9}">
           <p14:sldIdLst>
             <p14:sldId id="260"/>
             <p14:sldId id="261"/>
@@ -143,25 +143,25 @@
             <p14:sldId id="265"/>
           </p14:sldIdLst>
         </p14:section>
-        <p14:section name="개념" id="{85e19406-7160-355b-2ecd-515708586fdd}">
+        <p14:section name="개념" id="{bda57f01-c8a9-967f-1b59-79f416946dcc}">
           <p14:sldIdLst/>
         </p14:section>
-        <p14:section name="연습" id="{80898bf6-4407-dc7d-59aa-7a175a4434c3}">
+        <p14:section name="연습" id="{87693114-ff17-351e-f40f-ea03cd877ecf}">
           <p14:sldIdLst/>
         </p14:section>
-        <p14:section name="확인" id="{79109007-f2b1-32c1-3679-d4a6e30c571a}">
+        <p14:section name="확인" id="{d618a8a5-0f9b-c890-fdbc-4558b551503f}">
           <p14:sldIdLst>
             <p14:sldId id="266"/>
             <p14:sldId id="267"/>
             <p14:sldId id="268"/>
           </p14:sldIdLst>
         </p14:section>
-        <p14:section name="정리" id="{04d007cf-fdaf-cc6e-df2a-08b66e4b6fc7}">
+        <p14:section name="정리" id="{601a1e11-1951-5cf2-0715-def6f1a57afa}">
           <p14:sldIdLst>
             <p14:sldId id="269"/>
           </p14:sldIdLst>
         </p14:section>
-        <p14:section name="보충" id="{e1ae70e4-28f2-5d6f-e9f6-5a37b205834b}">
+        <p14:section name="보충" id="{d9c6d27d-e2c7-7ce6-8a63-b369c7ba03da}">
           <p14:sldIdLst>
             <p14:sldId id="270"/>
           </p14:sldIdLst>
